--- a/SKILLBRIDGE_Hackathon_Deck.pptx
+++ b/SKILLBRIDGE_Hackathon_Deck.pptx
@@ -11656,7 +11656,7 @@
         <p:spPr>
           <a:xfrm>
             <a:off x="548640" y="2514600"/>
-            <a:ext cx="10972800" cy="3017520"/>
+            <a:ext cx="8595360" cy="3017520"/>
           </a:xfrm>
           <a:prstGeom prst="rect">
             <a:avLst/>
@@ -11720,7 +11720,7 @@
         <p:spPr>
           <a:xfrm>
             <a:off x="548640" y="5394960"/>
-            <a:ext cx="8229600" cy="457200"/>
+            <a:ext cx="6858000" cy="457200"/>
           </a:xfrm>
           <a:prstGeom prst="rect">
             <a:avLst/>
@@ -11917,7 +11917,238 @@
       </p:sp>
       <p:sp>
         <p:nvSpPr>
-          <p:cNvPr id="37" name="TextBox 36"/>
+          <p:cNvPr id="37" name="Rectangle 36"/>
+          <p:cNvSpPr/>
+          <p:nvPr/>
+        </p:nvSpPr>
+        <p:spPr>
+          <a:xfrm>
+            <a:off x="9281160" y="2331720"/>
+            <a:ext cx="2468880" cy="3566160"/>
+          </a:xfrm>
+          <a:prstGeom prst="rect">
+            <a:avLst/>
+          </a:prstGeom>
+          <a:solidFill>
+            <a:srgbClr val="111522"/>
+          </a:solidFill>
+          <a:ln w="9525">
+            <a:solidFill>
+              <a:srgbClr val="66E4EE"/>
+            </a:solidFill>
+          </a:ln>
+          <a:effectLst/>
+        </p:spPr>
+        <p:style>
+          <a:lnRef idx="1">
+            <a:schemeClr val="accent1"/>
+          </a:lnRef>
+          <a:fillRef idx="3">
+            <a:schemeClr val="accent1"/>
+          </a:fillRef>
+          <a:effectRef idx="2">
+            <a:schemeClr val="accent1"/>
+          </a:effectRef>
+          <a:fontRef idx="minor">
+            <a:schemeClr val="lt1"/>
+          </a:fontRef>
+        </p:style>
+        <p:txBody>
+          <a:bodyPr rtlCol="0" anchor="ctr"/>
+          <a:lstStyle/>
+          <a:p>
+            <a:pPr algn="ctr"/>
+          </a:p>
+        </p:txBody>
+      </p:sp>
+      <p:sp>
+        <p:nvSpPr>
+          <p:cNvPr id="38" name="TextBox 37"/>
+          <p:cNvSpPr txBox="1"/>
+          <p:nvPr/>
+        </p:nvSpPr>
+        <p:spPr>
+          <a:xfrm>
+            <a:off x="9509760" y="2560320"/>
+            <a:ext cx="2011680" cy="274320"/>
+          </a:xfrm>
+          <a:prstGeom prst="rect">
+            <a:avLst/>
+          </a:prstGeom>
+          <a:noFill/>
+        </p:spPr>
+        <p:txBody>
+          <a:bodyPr wrap="square" lIns="0" rIns="0" tIns="0" bIns="0" anchor="t">
+            <a:spAutoFit/>
+          </a:bodyPr>
+          <a:lstStyle/>
+          <a:p>
+            <a:pPr algn="l">
+              <a:lnSpc>
+                <a:spcPct val="115000"/>
+              </a:lnSpc>
+            </a:pPr>
+            <a:r>
+              <a:rPr sz="1000" b="1" spc="180">
+                <a:solidFill>
+                  <a:srgbClr val="66E4EE"/>
+                </a:solidFill>
+                <a:latin typeface="Consolas"/>
+              </a:rPr>
+              <a:t>SCAN · OPEN ON YOUR PHONE</a:t>
+            </a:r>
+          </a:p>
+        </p:txBody>
+      </p:sp>
+      <p:sp>
+        <p:nvSpPr>
+          <p:cNvPr id="39" name="Rectangle 38"/>
+          <p:cNvSpPr/>
+          <p:nvPr/>
+        </p:nvSpPr>
+        <p:spPr>
+          <a:xfrm>
+            <a:off x="9601200" y="2971800"/>
+            <a:ext cx="1828800" cy="1828800"/>
+          </a:xfrm>
+          <a:prstGeom prst="rect">
+            <a:avLst/>
+          </a:prstGeom>
+          <a:solidFill>
+            <a:srgbClr val="F6F7FB"/>
+          </a:solidFill>
+          <a:ln>
+            <a:noFill/>
+          </a:ln>
+          <a:effectLst/>
+        </p:spPr>
+        <p:style>
+          <a:lnRef idx="1">
+            <a:schemeClr val="accent1"/>
+          </a:lnRef>
+          <a:fillRef idx="3">
+            <a:schemeClr val="accent1"/>
+          </a:fillRef>
+          <a:effectRef idx="2">
+            <a:schemeClr val="accent1"/>
+          </a:effectRef>
+          <a:fontRef idx="minor">
+            <a:schemeClr val="lt1"/>
+          </a:fontRef>
+        </p:style>
+        <p:txBody>
+          <a:bodyPr rtlCol="0" anchor="ctr"/>
+          <a:lstStyle/>
+          <a:p>
+            <a:pPr algn="ctr"/>
+          </a:p>
+        </p:txBody>
+      </p:sp>
+      <p:pic>
+        <p:nvPicPr>
+          <p:cNvPr id="40" name="Picture 39" descr="_qr_demo.png"/>
+          <p:cNvPicPr>
+            <a:picLocks noChangeAspect="1"/>
+          </p:cNvPicPr>
+          <p:nvPr/>
+        </p:nvPicPr>
+        <p:blipFill>
+          <a:blip r:embed="rId2"/>
+          <a:stretch>
+            <a:fillRect/>
+          </a:stretch>
+        </p:blipFill>
+        <p:spPr>
+          <a:xfrm>
+            <a:off x="9692640" y="3063240"/>
+            <a:ext cx="1645920" cy="1645920"/>
+          </a:xfrm>
+          <a:prstGeom prst="rect">
+            <a:avLst/>
+          </a:prstGeom>
+        </p:spPr>
+      </p:pic>
+      <p:sp>
+        <p:nvSpPr>
+          <p:cNvPr id="41" name="TextBox 40"/>
+          <p:cNvSpPr txBox="1"/>
+          <p:nvPr/>
+        </p:nvSpPr>
+        <p:spPr>
+          <a:xfrm>
+            <a:off x="9509760" y="4937760"/>
+            <a:ext cx="2011680" cy="457200"/>
+          </a:xfrm>
+          <a:prstGeom prst="rect">
+            <a:avLst/>
+          </a:prstGeom>
+          <a:noFill/>
+        </p:spPr>
+        <p:txBody>
+          <a:bodyPr wrap="square" lIns="0" rIns="0" tIns="0" bIns="0" anchor="t">
+            <a:spAutoFit/>
+          </a:bodyPr>
+          <a:lstStyle/>
+          <a:p>
+            <a:pPr algn="ctr">
+              <a:lnSpc>
+                <a:spcPct val="115000"/>
+              </a:lnSpc>
+            </a:pPr>
+            <a:r>
+              <a:rPr sz="1300" b="1">
+                <a:solidFill>
+                  <a:srgbClr val="F6F7FB"/>
+                </a:solidFill>
+                <a:latin typeface="Calibri"/>
+              </a:rPr>
+              <a:t>Try it while we talk.</a:t>
+            </a:r>
+          </a:p>
+        </p:txBody>
+      </p:sp>
+      <p:sp>
+        <p:nvSpPr>
+          <p:cNvPr id="42" name="TextBox 41"/>
+          <p:cNvSpPr txBox="1"/>
+          <p:nvPr/>
+        </p:nvSpPr>
+        <p:spPr>
+          <a:xfrm>
+            <a:off x="9509760" y="5257800"/>
+            <a:ext cx="2011680" cy="457200"/>
+          </a:xfrm>
+          <a:prstGeom prst="rect">
+            <a:avLst/>
+          </a:prstGeom>
+          <a:noFill/>
+        </p:spPr>
+        <p:txBody>
+          <a:bodyPr wrap="square" lIns="0" rIns="0" tIns="0" bIns="0" anchor="t">
+            <a:spAutoFit/>
+          </a:bodyPr>
+          <a:lstStyle/>
+          <a:p>
+            <a:pPr algn="ctr">
+              <a:lnSpc>
+                <a:spcPct val="115000"/>
+              </a:lnSpc>
+            </a:pPr>
+            <a:r>
+              <a:rPr sz="900" b="0" spc="100">
+                <a:solidFill>
+                  <a:srgbClr val="66E4EE"/>
+                </a:solidFill>
+                <a:latin typeface="Consolas"/>
+              </a:rPr>
+              <a:t>ai-match-hub-10.preview.emergentagent.com/</a:t>
+            </a:r>
+          </a:p>
+        </p:txBody>
+      </p:sp>
+      <p:sp>
+        <p:nvSpPr>
+          <p:cNvPr id="43" name="TextBox 42"/>
           <p:cNvSpPr txBox="1"/>
           <p:nvPr/>
         </p:nvSpPr>

--- a/SKILLBRIDGE_Hackathon_Deck.pptx
+++ b/SKILLBRIDGE_Hackathon_Deck.pptx
@@ -26754,7 +26754,7 @@
         <p:spPr>
           <a:xfrm>
             <a:off x="548640" y="2880360"/>
-            <a:ext cx="3703320" cy="3200400"/>
+            <a:ext cx="3703320" cy="2834640"/>
           </a:xfrm>
           <a:prstGeom prst="rect">
             <a:avLst/>
@@ -26839,7 +26839,7 @@
         <p:spPr>
           <a:xfrm>
             <a:off x="822960" y="3520440"/>
-            <a:ext cx="3154680" cy="2377440"/>
+            <a:ext cx="3154680" cy="2103120"/>
           </a:xfrm>
           <a:prstGeom prst="rect">
             <a:avLst/>
@@ -26854,11 +26854,11 @@
           <a:p>
             <a:pPr algn="l">
               <a:lnSpc>
-                <a:spcPct val="155000"/>
+                <a:spcPct val="150000"/>
               </a:lnSpc>
             </a:pPr>
             <a:r>
-              <a:rPr sz="1300" b="0">
+              <a:rPr sz="1250" b="0">
                 <a:solidFill>
                   <a:srgbClr val="9299AD"/>
                 </a:solidFill>
@@ -26870,11 +26870,11 @@
           <a:p>
             <a:pPr algn="l">
               <a:lnSpc>
-                <a:spcPct val="155000"/>
+                <a:spcPct val="150000"/>
               </a:lnSpc>
             </a:pPr>
             <a:r>
-              <a:rPr sz="1300" b="0">
+              <a:rPr sz="1250" b="0">
                 <a:solidFill>
                   <a:srgbClr val="9299AD"/>
                 </a:solidFill>
@@ -26886,11 +26886,11 @@
           <a:p>
             <a:pPr algn="l">
               <a:lnSpc>
-                <a:spcPct val="155000"/>
+                <a:spcPct val="150000"/>
               </a:lnSpc>
             </a:pPr>
             <a:r>
-              <a:rPr sz="1300" b="0">
+              <a:rPr sz="1250" b="0">
                 <a:solidFill>
                   <a:srgbClr val="9299AD"/>
                 </a:solidFill>
@@ -26902,11 +26902,11 @@
           <a:p>
             <a:pPr algn="l">
               <a:lnSpc>
-                <a:spcPct val="155000"/>
+                <a:spcPct val="150000"/>
               </a:lnSpc>
             </a:pPr>
             <a:r>
-              <a:rPr sz="1300" b="0">
+              <a:rPr sz="1250" b="0">
                 <a:solidFill>
                   <a:srgbClr val="9299AD"/>
                 </a:solidFill>
@@ -26918,11 +26918,11 @@
           <a:p>
             <a:pPr algn="l">
               <a:lnSpc>
-                <a:spcPct val="155000"/>
+                <a:spcPct val="150000"/>
               </a:lnSpc>
             </a:pPr>
             <a:r>
-              <a:rPr sz="1300" b="0">
+              <a:rPr sz="1250" b="0">
                 <a:solidFill>
                   <a:srgbClr val="9299AD"/>
                 </a:solidFill>
@@ -26942,7 +26942,7 @@
         <p:spPr>
           <a:xfrm>
             <a:off x="4389120" y="2880360"/>
-            <a:ext cx="3703320" cy="3200400"/>
+            <a:ext cx="3703320" cy="2834640"/>
           </a:xfrm>
           <a:prstGeom prst="rect">
             <a:avLst/>
@@ -27027,7 +27027,7 @@
         <p:spPr>
           <a:xfrm>
             <a:off x="4663440" y="3520440"/>
-            <a:ext cx="3154680" cy="2377440"/>
+            <a:ext cx="3154680" cy="2103120"/>
           </a:xfrm>
           <a:prstGeom prst="rect">
             <a:avLst/>
@@ -27042,11 +27042,11 @@
           <a:p>
             <a:pPr algn="l">
               <a:lnSpc>
-                <a:spcPct val="155000"/>
+                <a:spcPct val="150000"/>
               </a:lnSpc>
             </a:pPr>
             <a:r>
-              <a:rPr sz="1300" b="0">
+              <a:rPr sz="1250" b="0">
                 <a:solidFill>
                   <a:srgbClr val="9299AD"/>
                 </a:solidFill>
@@ -27058,11 +27058,11 @@
           <a:p>
             <a:pPr algn="l">
               <a:lnSpc>
-                <a:spcPct val="155000"/>
+                <a:spcPct val="150000"/>
               </a:lnSpc>
             </a:pPr>
             <a:r>
-              <a:rPr sz="1300" b="0">
+              <a:rPr sz="1250" b="0">
                 <a:solidFill>
                   <a:srgbClr val="9299AD"/>
                 </a:solidFill>
@@ -27074,11 +27074,11 @@
           <a:p>
             <a:pPr algn="l">
               <a:lnSpc>
-                <a:spcPct val="155000"/>
+                <a:spcPct val="150000"/>
               </a:lnSpc>
             </a:pPr>
             <a:r>
-              <a:rPr sz="1300" b="0">
+              <a:rPr sz="1250" b="0">
                 <a:solidFill>
                   <a:srgbClr val="9299AD"/>
                 </a:solidFill>
@@ -27090,11 +27090,11 @@
           <a:p>
             <a:pPr algn="l">
               <a:lnSpc>
-                <a:spcPct val="155000"/>
+                <a:spcPct val="150000"/>
               </a:lnSpc>
             </a:pPr>
             <a:r>
-              <a:rPr sz="1300" b="0">
+              <a:rPr sz="1250" b="0">
                 <a:solidFill>
                   <a:srgbClr val="9299AD"/>
                 </a:solidFill>
@@ -27106,11 +27106,11 @@
           <a:p>
             <a:pPr algn="l">
               <a:lnSpc>
-                <a:spcPct val="155000"/>
+                <a:spcPct val="150000"/>
               </a:lnSpc>
             </a:pPr>
             <a:r>
-              <a:rPr sz="1300" b="0">
+              <a:rPr sz="1250" b="0">
                 <a:solidFill>
                   <a:srgbClr val="9299AD"/>
                 </a:solidFill>
@@ -27122,11 +27122,11 @@
           <a:p>
             <a:pPr algn="l">
               <a:lnSpc>
-                <a:spcPct val="155000"/>
+                <a:spcPct val="150000"/>
               </a:lnSpc>
             </a:pPr>
             <a:r>
-              <a:rPr sz="1300" b="0">
+              <a:rPr sz="1250" b="0">
                 <a:solidFill>
                   <a:srgbClr val="9299AD"/>
                 </a:solidFill>
@@ -27146,7 +27146,7 @@
         <p:spPr>
           <a:xfrm>
             <a:off x="8229600" y="2880360"/>
-            <a:ext cx="3703320" cy="3200400"/>
+            <a:ext cx="3703320" cy="2834640"/>
           </a:xfrm>
           <a:prstGeom prst="rect">
             <a:avLst/>
@@ -27231,7 +27231,7 @@
         <p:spPr>
           <a:xfrm>
             <a:off x="8503920" y="3520440"/>
-            <a:ext cx="3154680" cy="2377440"/>
+            <a:ext cx="3154680" cy="2103120"/>
           </a:xfrm>
           <a:prstGeom prst="rect">
             <a:avLst/>
@@ -27246,11 +27246,11 @@
           <a:p>
             <a:pPr algn="l">
               <a:lnSpc>
-                <a:spcPct val="155000"/>
+                <a:spcPct val="150000"/>
               </a:lnSpc>
             </a:pPr>
             <a:r>
-              <a:rPr sz="1300" b="0">
+              <a:rPr sz="1250" b="0">
                 <a:solidFill>
                   <a:srgbClr val="9299AD"/>
                 </a:solidFill>
@@ -27262,11 +27262,11 @@
           <a:p>
             <a:pPr algn="l">
               <a:lnSpc>
-                <a:spcPct val="155000"/>
+                <a:spcPct val="150000"/>
               </a:lnSpc>
             </a:pPr>
             <a:r>
-              <a:rPr sz="1300" b="0">
+              <a:rPr sz="1250" b="0">
                 <a:solidFill>
                   <a:srgbClr val="9299AD"/>
                 </a:solidFill>
@@ -27278,11 +27278,11 @@
           <a:p>
             <a:pPr algn="l">
               <a:lnSpc>
-                <a:spcPct val="155000"/>
+                <a:spcPct val="150000"/>
               </a:lnSpc>
             </a:pPr>
             <a:r>
-              <a:rPr sz="1300" b="0">
+              <a:rPr sz="1250" b="0">
                 <a:solidFill>
                   <a:srgbClr val="9299AD"/>
                 </a:solidFill>
@@ -27294,11 +27294,11 @@
           <a:p>
             <a:pPr algn="l">
               <a:lnSpc>
-                <a:spcPct val="155000"/>
+                <a:spcPct val="150000"/>
               </a:lnSpc>
             </a:pPr>
             <a:r>
-              <a:rPr sz="1300" b="0">
+              <a:rPr sz="1250" b="0">
                 <a:solidFill>
                   <a:srgbClr val="9299AD"/>
                 </a:solidFill>
@@ -27310,11 +27310,11 @@
           <a:p>
             <a:pPr algn="l">
               <a:lnSpc>
-                <a:spcPct val="155000"/>
+                <a:spcPct val="150000"/>
               </a:lnSpc>
             </a:pPr>
             <a:r>
-              <a:rPr sz="1300" b="0">
+              <a:rPr sz="1250" b="0">
                 <a:solidFill>
                   <a:srgbClr val="9299AD"/>
                 </a:solidFill>
@@ -27333,8 +27333,8 @@
         </p:nvSpPr>
         <p:spPr>
           <a:xfrm>
-            <a:off x="548640" y="6172200"/>
-            <a:ext cx="2761488" cy="502920"/>
+            <a:off x="548640" y="5852160"/>
+            <a:ext cx="2761488" cy="457200"/>
           </a:xfrm>
           <a:prstGeom prst="rect">
             <a:avLst/>
@@ -27379,8 +27379,8 @@
         </p:nvSpPr>
         <p:spPr>
           <a:xfrm>
-            <a:off x="731520" y="6263640"/>
-            <a:ext cx="822960" cy="365760"/>
+            <a:off x="731520" y="5934456"/>
+            <a:ext cx="640080" cy="365760"/>
           </a:xfrm>
           <a:prstGeom prst="rect">
             <a:avLst/>
@@ -27399,7 +27399,7 @@
               </a:lnSpc>
             </a:pPr>
             <a:r>
-              <a:rPr sz="1700" b="1">
+              <a:rPr sz="1600" b="1">
                 <a:solidFill>
                   <a:srgbClr val="66E4EE"/>
                 </a:solidFill>
@@ -27418,8 +27418,8 @@
         </p:nvSpPr>
         <p:spPr>
           <a:xfrm>
-            <a:off x="1554480" y="6291072"/>
-            <a:ext cx="1664208" cy="365760"/>
+            <a:off x="1417320" y="5989320"/>
+            <a:ext cx="1801368" cy="365760"/>
           </a:xfrm>
           <a:prstGeom prst="rect">
             <a:avLst/>
@@ -27438,7 +27438,7 @@
               </a:lnSpc>
             </a:pPr>
             <a:r>
-              <a:rPr sz="1000" b="0" spc="140">
+              <a:rPr sz="950" b="0" spc="140">
                 <a:solidFill>
                   <a:srgbClr val="9299AD"/>
                 </a:solidFill>
@@ -27457,8 +27457,8 @@
         </p:nvSpPr>
         <p:spPr>
           <a:xfrm>
-            <a:off x="3419856" y="6172200"/>
-            <a:ext cx="2761488" cy="502920"/>
+            <a:off x="3419856" y="5852160"/>
+            <a:ext cx="2761488" cy="457200"/>
           </a:xfrm>
           <a:prstGeom prst="rect">
             <a:avLst/>
@@ -27503,8 +27503,8 @@
         </p:nvSpPr>
         <p:spPr>
           <a:xfrm>
-            <a:off x="3602736" y="6263640"/>
-            <a:ext cx="822960" cy="365760"/>
+            <a:off x="3602736" y="5934456"/>
+            <a:ext cx="640080" cy="365760"/>
           </a:xfrm>
           <a:prstGeom prst="rect">
             <a:avLst/>
@@ -27523,7 +27523,7 @@
               </a:lnSpc>
             </a:pPr>
             <a:r>
-              <a:rPr sz="1700" b="1">
+              <a:rPr sz="1600" b="1">
                 <a:solidFill>
                   <a:srgbClr val="66E4EE"/>
                 </a:solidFill>
@@ -27542,8 +27542,8 @@
         </p:nvSpPr>
         <p:spPr>
           <a:xfrm>
-            <a:off x="4425696" y="6291072"/>
-            <a:ext cx="1664208" cy="365760"/>
+            <a:off x="4288536" y="5989320"/>
+            <a:ext cx="1801368" cy="365760"/>
           </a:xfrm>
           <a:prstGeom prst="rect">
             <a:avLst/>
@@ -27562,7 +27562,7 @@
               </a:lnSpc>
             </a:pPr>
             <a:r>
-              <a:rPr sz="1000" b="0" spc="140">
+              <a:rPr sz="950" b="0" spc="140">
                 <a:solidFill>
                   <a:srgbClr val="9299AD"/>
                 </a:solidFill>
@@ -27581,8 +27581,8 @@
         </p:nvSpPr>
         <p:spPr>
           <a:xfrm>
-            <a:off x="6291072" y="6172200"/>
-            <a:ext cx="2761488" cy="502920"/>
+            <a:off x="6291072" y="5852160"/>
+            <a:ext cx="2761488" cy="457200"/>
           </a:xfrm>
           <a:prstGeom prst="rect">
             <a:avLst/>
@@ -27627,8 +27627,8 @@
         </p:nvSpPr>
         <p:spPr>
           <a:xfrm>
-            <a:off x="6473952" y="6263640"/>
-            <a:ext cx="822960" cy="365760"/>
+            <a:off x="6473952" y="5934456"/>
+            <a:ext cx="640080" cy="365760"/>
           </a:xfrm>
           <a:prstGeom prst="rect">
             <a:avLst/>
@@ -27647,7 +27647,7 @@
               </a:lnSpc>
             </a:pPr>
             <a:r>
-              <a:rPr sz="1700" b="1">
+              <a:rPr sz="1600" b="1">
                 <a:solidFill>
                   <a:srgbClr val="66E4EE"/>
                 </a:solidFill>
@@ -27666,8 +27666,8 @@
         </p:nvSpPr>
         <p:spPr>
           <a:xfrm>
-            <a:off x="7296912" y="6291072"/>
-            <a:ext cx="1664208" cy="365760"/>
+            <a:off x="7159752" y="5989320"/>
+            <a:ext cx="1801368" cy="365760"/>
           </a:xfrm>
           <a:prstGeom prst="rect">
             <a:avLst/>
@@ -27686,7 +27686,7 @@
               </a:lnSpc>
             </a:pPr>
             <a:r>
-              <a:rPr sz="1000" b="0" spc="140">
+              <a:rPr sz="950" b="0" spc="140">
                 <a:solidFill>
                   <a:srgbClr val="9299AD"/>
                 </a:solidFill>
@@ -27705,8 +27705,8 @@
         </p:nvSpPr>
         <p:spPr>
           <a:xfrm>
-            <a:off x="9162288" y="6172200"/>
-            <a:ext cx="2761488" cy="502920"/>
+            <a:off x="9162288" y="5852160"/>
+            <a:ext cx="2761488" cy="457200"/>
           </a:xfrm>
           <a:prstGeom prst="rect">
             <a:avLst/>
@@ -27751,8 +27751,8 @@
         </p:nvSpPr>
         <p:spPr>
           <a:xfrm>
-            <a:off x="9345168" y="6263640"/>
-            <a:ext cx="822960" cy="365760"/>
+            <a:off x="9345168" y="5934456"/>
+            <a:ext cx="640080" cy="365760"/>
           </a:xfrm>
           <a:prstGeom prst="rect">
             <a:avLst/>
@@ -27771,7 +27771,7 @@
               </a:lnSpc>
             </a:pPr>
             <a:r>
-              <a:rPr sz="1700" b="1">
+              <a:rPr sz="1600" b="1">
                 <a:solidFill>
                   <a:srgbClr val="66E4EE"/>
                 </a:solidFill>
@@ -27790,8 +27790,8 @@
         </p:nvSpPr>
         <p:spPr>
           <a:xfrm>
-            <a:off x="10168128" y="6291072"/>
-            <a:ext cx="1664208" cy="365760"/>
+            <a:off x="10030968" y="5989320"/>
+            <a:ext cx="1801368" cy="365760"/>
           </a:xfrm>
           <a:prstGeom prst="rect">
             <a:avLst/>
@@ -27810,7 +27810,7 @@
               </a:lnSpc>
             </a:pPr>
             <a:r>
-              <a:rPr sz="1000" b="0" spc="140">
+              <a:rPr sz="950" b="0" spc="140">
                 <a:solidFill>
                   <a:srgbClr val="9299AD"/>
                 </a:solidFill>
@@ -33075,7 +33075,7 @@
         </p:nvSpPr>
         <p:spPr>
           <a:xfrm>
-            <a:off x="548640" y="2862072"/>
+            <a:off x="548640" y="2770632"/>
             <a:ext cx="320040" cy="320040"/>
           </a:xfrm>
           <a:prstGeom prst="ellipse">
@@ -33119,7 +33119,7 @@
         </p:nvSpPr>
         <p:spPr>
           <a:xfrm>
-            <a:off x="548640" y="2843784"/>
+            <a:off x="548640" y="2752344"/>
             <a:ext cx="320040" cy="320040"/>
           </a:xfrm>
           <a:prstGeom prst="rect">
@@ -33158,7 +33158,7 @@
         </p:nvSpPr>
         <p:spPr>
           <a:xfrm>
-            <a:off x="1051560" y="2743200"/>
+            <a:off x="1051560" y="2651760"/>
             <a:ext cx="3657600" cy="457200"/>
           </a:xfrm>
           <a:prstGeom prst="rect">
@@ -33178,7 +33178,7 @@
               </a:lnSpc>
             </a:pPr>
             <a:r>
-              <a:rPr sz="1700" b="1">
+              <a:rPr sz="1600" b="1">
                 <a:solidFill>
                   <a:srgbClr val="F6F7FB"/>
                 </a:solidFill>
@@ -33197,8 +33197,8 @@
         </p:nvSpPr>
         <p:spPr>
           <a:xfrm>
-            <a:off x="4937760" y="2834640"/>
-            <a:ext cx="6675120" cy="822960"/>
+            <a:off x="4937760" y="2697480"/>
+            <a:ext cx="6675120" cy="777240"/>
           </a:xfrm>
           <a:prstGeom prst="rect">
             <a:avLst/>
@@ -33217,7 +33217,7 @@
               </a:lnSpc>
             </a:pPr>
             <a:r>
-              <a:rPr sz="1300" b="0">
+              <a:rPr sz="1250" b="0">
                 <a:solidFill>
                   <a:srgbClr val="9299AD"/>
                 </a:solidFill>
@@ -33236,7 +33236,7 @@
         </p:nvSpPr>
         <p:spPr>
           <a:xfrm>
-            <a:off x="548640" y="3913632"/>
+            <a:off x="548640" y="3712464"/>
             <a:ext cx="320040" cy="320040"/>
           </a:xfrm>
           <a:prstGeom prst="ellipse">
@@ -33280,7 +33280,7 @@
         </p:nvSpPr>
         <p:spPr>
           <a:xfrm>
-            <a:off x="548640" y="3895344"/>
+            <a:off x="548640" y="3694176"/>
             <a:ext cx="320040" cy="320040"/>
           </a:xfrm>
           <a:prstGeom prst="rect">
@@ -33319,7 +33319,7 @@
         </p:nvSpPr>
         <p:spPr>
           <a:xfrm>
-            <a:off x="1051560" y="3794760"/>
+            <a:off x="1051560" y="3593592"/>
             <a:ext cx="3657600" cy="457200"/>
           </a:xfrm>
           <a:prstGeom prst="rect">
@@ -33339,7 +33339,7 @@
               </a:lnSpc>
             </a:pPr>
             <a:r>
-              <a:rPr sz="1700" b="1">
+              <a:rPr sz="1600" b="1">
                 <a:solidFill>
                   <a:srgbClr val="F6F7FB"/>
                 </a:solidFill>
@@ -33358,8 +33358,8 @@
         </p:nvSpPr>
         <p:spPr>
           <a:xfrm>
-            <a:off x="4937760" y="3886200"/>
-            <a:ext cx="6675120" cy="822960"/>
+            <a:off x="4937760" y="3639312"/>
+            <a:ext cx="6675120" cy="777240"/>
           </a:xfrm>
           <a:prstGeom prst="rect">
             <a:avLst/>
@@ -33378,7 +33378,7 @@
               </a:lnSpc>
             </a:pPr>
             <a:r>
-              <a:rPr sz="1300" b="0">
+              <a:rPr sz="1250" b="0">
                 <a:solidFill>
                   <a:srgbClr val="9299AD"/>
                 </a:solidFill>
@@ -33397,7 +33397,7 @@
         </p:nvSpPr>
         <p:spPr>
           <a:xfrm>
-            <a:off x="548640" y="4965192"/>
+            <a:off x="548640" y="4654296"/>
             <a:ext cx="320040" cy="320040"/>
           </a:xfrm>
           <a:prstGeom prst="ellipse">
@@ -33441,7 +33441,7 @@
         </p:nvSpPr>
         <p:spPr>
           <a:xfrm>
-            <a:off x="548640" y="4946904"/>
+            <a:off x="548640" y="4636008"/>
             <a:ext cx="320040" cy="320040"/>
           </a:xfrm>
           <a:prstGeom prst="rect">
@@ -33480,7 +33480,7 @@
         </p:nvSpPr>
         <p:spPr>
           <a:xfrm>
-            <a:off x="1051560" y="4846320"/>
+            <a:off x="1051560" y="4535424"/>
             <a:ext cx="3657600" cy="457200"/>
           </a:xfrm>
           <a:prstGeom prst="rect">
@@ -33500,7 +33500,7 @@
               </a:lnSpc>
             </a:pPr>
             <a:r>
-              <a:rPr sz="1700" b="1">
+              <a:rPr sz="1600" b="1">
                 <a:solidFill>
                   <a:srgbClr val="F6F7FB"/>
                 </a:solidFill>
@@ -33519,8 +33519,8 @@
         </p:nvSpPr>
         <p:spPr>
           <a:xfrm>
-            <a:off x="4937760" y="4937760"/>
-            <a:ext cx="6675120" cy="822960"/>
+            <a:off x="4937760" y="4581144"/>
+            <a:ext cx="6675120" cy="777240"/>
           </a:xfrm>
           <a:prstGeom prst="rect">
             <a:avLst/>
@@ -33539,7 +33539,7 @@
               </a:lnSpc>
             </a:pPr>
             <a:r>
-              <a:rPr sz="1300" b="0">
+              <a:rPr sz="1250" b="0">
                 <a:solidFill>
                   <a:srgbClr val="9299AD"/>
                 </a:solidFill>
@@ -33558,7 +33558,7 @@
         </p:nvSpPr>
         <p:spPr>
           <a:xfrm>
-            <a:off x="548640" y="6016752"/>
+            <a:off x="548640" y="5596128"/>
             <a:ext cx="320040" cy="320040"/>
           </a:xfrm>
           <a:prstGeom prst="ellipse">
@@ -33602,7 +33602,7 @@
         </p:nvSpPr>
         <p:spPr>
           <a:xfrm>
-            <a:off x="548640" y="5998464"/>
+            <a:off x="548640" y="5577840"/>
             <a:ext cx="320040" cy="320040"/>
           </a:xfrm>
           <a:prstGeom prst="rect">
@@ -33641,7 +33641,7 @@
         </p:nvSpPr>
         <p:spPr>
           <a:xfrm>
-            <a:off x="1051560" y="5897880"/>
+            <a:off x="1051560" y="5477256"/>
             <a:ext cx="3657600" cy="457200"/>
           </a:xfrm>
           <a:prstGeom prst="rect">
@@ -33661,7 +33661,7 @@
               </a:lnSpc>
             </a:pPr>
             <a:r>
-              <a:rPr sz="1700" b="1">
+              <a:rPr sz="1600" b="1">
                 <a:solidFill>
                   <a:srgbClr val="F6F7FB"/>
                 </a:solidFill>
@@ -33680,8 +33680,8 @@
         </p:nvSpPr>
         <p:spPr>
           <a:xfrm>
-            <a:off x="4937760" y="5989320"/>
-            <a:ext cx="6675120" cy="822960"/>
+            <a:off x="4937760" y="5522976"/>
+            <a:ext cx="6675120" cy="777240"/>
           </a:xfrm>
           <a:prstGeom prst="rect">
             <a:avLst/>
@@ -33700,7 +33700,7 @@
               </a:lnSpc>
             </a:pPr>
             <a:r>
-              <a:rPr sz="1300" b="0">
+              <a:rPr sz="1250" b="0">
                 <a:solidFill>
                   <a:srgbClr val="9299AD"/>
                 </a:solidFill>
